--- a/docs/答辩/转转-答辩-v4.pptx
+++ b/docs/答辩/转转-答辩-v4.pptx
@@ -5,24 +5,24 @@
     <p:sldMasterId id="2147483648" r:id="rId1"/>
   </p:sldMasterIdLst>
   <p:sldIdLst>
-    <p:sldId id="256" r:id="rId7"/>
-    <p:sldId id="257" r:id="rId8"/>
-    <p:sldId id="258" r:id="rId9"/>
-    <p:sldId id="259" r:id="rId10"/>
-    <p:sldId id="260" r:id="rId11"/>
-    <p:sldId id="261" r:id="rId12"/>
-    <p:sldId id="262" r:id="rId13"/>
-    <p:sldId id="263" r:id="rId14"/>
-    <p:sldId id="264" r:id="rId15"/>
-    <p:sldId id="265" r:id="rId16"/>
-    <p:sldId id="266" r:id="rId17"/>
-    <p:sldId id="267" r:id="rId18"/>
-    <p:sldId id="268" r:id="rId19"/>
-    <p:sldId id="269" r:id="rId20"/>
-    <p:sldId id="270" r:id="rId21"/>
-    <p:sldId id="271" r:id="rId22"/>
+    <p:sldId id="256" r:id="rId2"/>
+    <p:sldId id="257" r:id="rId3"/>
+    <p:sldId id="258" r:id="rId4"/>
+    <p:sldId id="259" r:id="rId5"/>
+    <p:sldId id="260" r:id="rId6"/>
+    <p:sldId id="261" r:id="rId7"/>
+    <p:sldId id="262" r:id="rId8"/>
+    <p:sldId id="263" r:id="rId9"/>
+    <p:sldId id="264" r:id="rId10"/>
+    <p:sldId id="265" r:id="rId11"/>
+    <p:sldId id="266" r:id="rId12"/>
+    <p:sldId id="267" r:id="rId13"/>
+    <p:sldId id="268" r:id="rId14"/>
+    <p:sldId id="269" r:id="rId15"/>
+    <p:sldId id="270" r:id="rId16"/>
+    <p:sldId id="271" r:id="rId17"/>
   </p:sldIdLst>
-  <p:sldSz cx="12192000" cy="6858000" type="screen4x3"/>
+  <p:sldSz cx="12192000" cy="6858000"/>
   <p:notesSz cx="6858000" cy="9144000"/>
   <p:defaultTextStyle>
     <a:defPPr>
@@ -119,6 +119,22 @@
       </a:defRPr>
     </a:lvl9pPr>
   </p:defaultTextStyle>
+  <p:extLst>
+    <p:ext uri="{EFAFB233-063F-42B5-8137-9DF3F51BA10A}">
+      <p15:sldGuideLst xmlns:p15="http://schemas.microsoft.com/office/powerpoint/2012/main">
+        <p15:guide id="1" orient="horz" pos="2160">
+          <p15:clr>
+            <a:srgbClr val="A4A3A4"/>
+          </p15:clr>
+        </p15:guide>
+        <p15:guide id="2" pos="2880">
+          <p15:clr>
+            <a:srgbClr val="A4A3A4"/>
+          </p15:clr>
+        </p15:guide>
+      </p15:sldGuideLst>
+    </p:ext>
+  </p:extLst>
 </p:presentation>
 </file>
 
@@ -160,10 +176,9 @@
           <a:lstStyle/>
           <a:p>
             <a:r>
-              <a:rPr lang="en-US" smtClean="0"/>
+              <a:rPr lang="en-US"/>
               <a:t>Click to edit Master title style</a:t>
             </a:r>
-            <a:endParaRPr lang="en-US"/>
           </a:p>
         </p:txBody>
       </p:sp>
@@ -279,10 +294,9 @@
           </a:lstStyle>
           <a:p>
             <a:r>
-              <a:rPr lang="en-US" smtClean="0"/>
+              <a:rPr lang="en-US"/>
               <a:t>Click to edit Master subtitle style</a:t>
             </a:r>
-            <a:endParaRPr lang="en-US"/>
           </a:p>
         </p:txBody>
       </p:sp>
@@ -303,7 +317,7 @@
           <a:p>
             <a:fld id="{5BCAD085-E8A6-8845-BD4E-CB4CCA059FC4}" type="datetimeFigureOut">
               <a:rPr lang="en-US" smtClean="0"/>
-              <a:t>1/27/13</a:t>
+              <a:t>7/9/2026</a:t>
             </a:fld>
             <a:endParaRPr lang="en-US"/>
           </a:p>
@@ -397,10 +411,9 @@
           <a:lstStyle/>
           <a:p>
             <a:r>
-              <a:rPr lang="en-US" smtClean="0"/>
+              <a:rPr lang="en-US"/>
               <a:t>Click to edit Master title style</a:t>
             </a:r>
-            <a:endParaRPr lang="en-US"/>
           </a:p>
         </p:txBody>
       </p:sp>
@@ -421,38 +434,37 @@
           <a:p>
             <a:pPr lvl="0"/>
             <a:r>
-              <a:rPr lang="en-US" smtClean="0"/>
+              <a:rPr lang="en-US"/>
               <a:t>Click to edit Master text styles</a:t>
             </a:r>
           </a:p>
           <a:p>
             <a:pPr lvl="1"/>
             <a:r>
-              <a:rPr lang="en-US" smtClean="0"/>
+              <a:rPr lang="en-US"/>
               <a:t>Second level</a:t>
             </a:r>
           </a:p>
           <a:p>
             <a:pPr lvl="2"/>
             <a:r>
-              <a:rPr lang="en-US" smtClean="0"/>
+              <a:rPr lang="en-US"/>
               <a:t>Third level</a:t>
             </a:r>
           </a:p>
           <a:p>
             <a:pPr lvl="3"/>
             <a:r>
-              <a:rPr lang="en-US" smtClean="0"/>
+              <a:rPr lang="en-US"/>
               <a:t>Fourth level</a:t>
             </a:r>
           </a:p>
           <a:p>
             <a:pPr lvl="4"/>
             <a:r>
-              <a:rPr lang="en-US" smtClean="0"/>
+              <a:rPr lang="en-US"/>
               <a:t>Fifth level</a:t>
             </a:r>
-            <a:endParaRPr lang="en-US"/>
           </a:p>
         </p:txBody>
       </p:sp>
@@ -473,7 +485,7 @@
           <a:p>
             <a:fld id="{5BCAD085-E8A6-8845-BD4E-CB4CCA059FC4}" type="datetimeFigureOut">
               <a:rPr lang="en-US" smtClean="0"/>
-              <a:t>1/27/13</a:t>
+              <a:t>7/9/2026</a:t>
             </a:fld>
             <a:endParaRPr lang="en-US"/>
           </a:p>
@@ -572,10 +584,9 @@
           <a:lstStyle/>
           <a:p>
             <a:r>
-              <a:rPr lang="en-US" smtClean="0"/>
+              <a:rPr lang="en-US"/>
               <a:t>Click to edit Master title style</a:t>
             </a:r>
-            <a:endParaRPr lang="en-US"/>
           </a:p>
         </p:txBody>
       </p:sp>
@@ -601,38 +612,37 @@
           <a:p>
             <a:pPr lvl="0"/>
             <a:r>
-              <a:rPr lang="en-US" smtClean="0"/>
+              <a:rPr lang="en-US"/>
               <a:t>Click to edit Master text styles</a:t>
             </a:r>
           </a:p>
           <a:p>
             <a:pPr lvl="1"/>
             <a:r>
-              <a:rPr lang="en-US" smtClean="0"/>
+              <a:rPr lang="en-US"/>
               <a:t>Second level</a:t>
             </a:r>
           </a:p>
           <a:p>
             <a:pPr lvl="2"/>
             <a:r>
-              <a:rPr lang="en-US" smtClean="0"/>
+              <a:rPr lang="en-US"/>
               <a:t>Third level</a:t>
             </a:r>
           </a:p>
           <a:p>
             <a:pPr lvl="3"/>
             <a:r>
-              <a:rPr lang="en-US" smtClean="0"/>
+              <a:rPr lang="en-US"/>
               <a:t>Fourth level</a:t>
             </a:r>
           </a:p>
           <a:p>
             <a:pPr lvl="4"/>
             <a:r>
-              <a:rPr lang="en-US" smtClean="0"/>
+              <a:rPr lang="en-US"/>
               <a:t>Fifth level</a:t>
             </a:r>
-            <a:endParaRPr lang="en-US"/>
           </a:p>
         </p:txBody>
       </p:sp>
@@ -653,7 +663,7 @@
           <a:p>
             <a:fld id="{5BCAD085-E8A6-8845-BD4E-CB4CCA059FC4}" type="datetimeFigureOut">
               <a:rPr lang="en-US" smtClean="0"/>
-              <a:t>1/27/13</a:t>
+              <a:t>7/9/2026</a:t>
             </a:fld>
             <a:endParaRPr lang="en-US"/>
           </a:p>
@@ -747,10 +757,9 @@
           <a:lstStyle/>
           <a:p>
             <a:r>
-              <a:rPr lang="en-US" smtClean="0"/>
+              <a:rPr lang="en-US"/>
               <a:t>Click to edit Master title style</a:t>
             </a:r>
-            <a:endParaRPr lang="en-US"/>
           </a:p>
         </p:txBody>
       </p:sp>
@@ -771,38 +780,37 @@
           <a:p>
             <a:pPr lvl="0"/>
             <a:r>
-              <a:rPr lang="en-US" smtClean="0"/>
+              <a:rPr lang="en-US"/>
               <a:t>Click to edit Master text styles</a:t>
             </a:r>
           </a:p>
           <a:p>
             <a:pPr lvl="1"/>
             <a:r>
-              <a:rPr lang="en-US" smtClean="0"/>
+              <a:rPr lang="en-US"/>
               <a:t>Second level</a:t>
             </a:r>
           </a:p>
           <a:p>
             <a:pPr lvl="2"/>
             <a:r>
-              <a:rPr lang="en-US" smtClean="0"/>
+              <a:rPr lang="en-US"/>
               <a:t>Third level</a:t>
             </a:r>
           </a:p>
           <a:p>
             <a:pPr lvl="3"/>
             <a:r>
-              <a:rPr lang="en-US" smtClean="0"/>
+              <a:rPr lang="en-US"/>
               <a:t>Fourth level</a:t>
             </a:r>
           </a:p>
           <a:p>
             <a:pPr lvl="4"/>
             <a:r>
-              <a:rPr lang="en-US" smtClean="0"/>
+              <a:rPr lang="en-US"/>
               <a:t>Fifth level</a:t>
             </a:r>
-            <a:endParaRPr lang="en-US"/>
           </a:p>
         </p:txBody>
       </p:sp>
@@ -823,7 +831,7 @@
           <a:p>
             <a:fld id="{5BCAD085-E8A6-8845-BD4E-CB4CCA059FC4}" type="datetimeFigureOut">
               <a:rPr lang="en-US" smtClean="0"/>
-              <a:t>1/27/13</a:t>
+              <a:t>7/9/2026</a:t>
             </a:fld>
             <a:endParaRPr lang="en-US"/>
           </a:p>
@@ -926,10 +934,9 @@
           </a:lstStyle>
           <a:p>
             <a:r>
-              <a:rPr lang="en-US" smtClean="0"/>
+              <a:rPr lang="en-US"/>
               <a:t>Click to edit Master title style</a:t>
             </a:r>
-            <a:endParaRPr lang="en-US"/>
           </a:p>
         </p:txBody>
       </p:sp>
@@ -1046,7 +1053,7 @@
           <a:p>
             <a:pPr lvl="0"/>
             <a:r>
-              <a:rPr lang="en-US" smtClean="0"/>
+              <a:rPr lang="en-US"/>
               <a:t>Click to edit Master text styles</a:t>
             </a:r>
           </a:p>
@@ -1069,7 +1076,7 @@
           <a:p>
             <a:fld id="{5BCAD085-E8A6-8845-BD4E-CB4CCA059FC4}" type="datetimeFigureOut">
               <a:rPr lang="en-US" smtClean="0"/>
-              <a:t>1/27/13</a:t>
+              <a:t>7/9/2026</a:t>
             </a:fld>
             <a:endParaRPr lang="en-US"/>
           </a:p>
@@ -1163,10 +1170,9 @@
           <a:lstStyle/>
           <a:p>
             <a:r>
-              <a:rPr lang="en-US" smtClean="0"/>
+              <a:rPr lang="en-US"/>
               <a:t>Click to edit Master title style</a:t>
             </a:r>
-            <a:endParaRPr lang="en-US"/>
           </a:p>
         </p:txBody>
       </p:sp>
@@ -1220,38 +1226,37 @@
           <a:p>
             <a:pPr lvl="0"/>
             <a:r>
-              <a:rPr lang="en-US" smtClean="0"/>
+              <a:rPr lang="en-US"/>
               <a:t>Click to edit Master text styles</a:t>
             </a:r>
           </a:p>
           <a:p>
             <a:pPr lvl="1"/>
             <a:r>
-              <a:rPr lang="en-US" smtClean="0"/>
+              <a:rPr lang="en-US"/>
               <a:t>Second level</a:t>
             </a:r>
           </a:p>
           <a:p>
             <a:pPr lvl="2"/>
             <a:r>
-              <a:rPr lang="en-US" smtClean="0"/>
+              <a:rPr lang="en-US"/>
               <a:t>Third level</a:t>
             </a:r>
           </a:p>
           <a:p>
             <a:pPr lvl="3"/>
             <a:r>
-              <a:rPr lang="en-US" smtClean="0"/>
+              <a:rPr lang="en-US"/>
               <a:t>Fourth level</a:t>
             </a:r>
           </a:p>
           <a:p>
             <a:pPr lvl="4"/>
             <a:r>
-              <a:rPr lang="en-US" smtClean="0"/>
+              <a:rPr lang="en-US"/>
               <a:t>Fifth level</a:t>
             </a:r>
-            <a:endParaRPr lang="en-US"/>
           </a:p>
         </p:txBody>
       </p:sp>
@@ -1305,38 +1310,37 @@
           <a:p>
             <a:pPr lvl="0"/>
             <a:r>
-              <a:rPr lang="en-US" smtClean="0"/>
+              <a:rPr lang="en-US"/>
               <a:t>Click to edit Master text styles</a:t>
             </a:r>
           </a:p>
           <a:p>
             <a:pPr lvl="1"/>
             <a:r>
-              <a:rPr lang="en-US" smtClean="0"/>
+              <a:rPr lang="en-US"/>
               <a:t>Second level</a:t>
             </a:r>
           </a:p>
           <a:p>
             <a:pPr lvl="2"/>
             <a:r>
-              <a:rPr lang="en-US" smtClean="0"/>
+              <a:rPr lang="en-US"/>
               <a:t>Third level</a:t>
             </a:r>
           </a:p>
           <a:p>
             <a:pPr lvl="3"/>
             <a:r>
-              <a:rPr lang="en-US" smtClean="0"/>
+              <a:rPr lang="en-US"/>
               <a:t>Fourth level</a:t>
             </a:r>
           </a:p>
           <a:p>
             <a:pPr lvl="4"/>
             <a:r>
-              <a:rPr lang="en-US" smtClean="0"/>
+              <a:rPr lang="en-US"/>
               <a:t>Fifth level</a:t>
             </a:r>
-            <a:endParaRPr lang="en-US"/>
           </a:p>
         </p:txBody>
       </p:sp>
@@ -1357,7 +1361,7 @@
           <a:p>
             <a:fld id="{5BCAD085-E8A6-8845-BD4E-CB4CCA059FC4}" type="datetimeFigureOut">
               <a:rPr lang="en-US" smtClean="0"/>
-              <a:t>1/27/13</a:t>
+              <a:t>7/9/2026</a:t>
             </a:fld>
             <a:endParaRPr lang="en-US"/>
           </a:p>
@@ -1455,10 +1459,9 @@
           </a:lstStyle>
           <a:p>
             <a:r>
-              <a:rPr lang="en-US" smtClean="0"/>
+              <a:rPr lang="en-US"/>
               <a:t>Click to edit Master title style</a:t>
             </a:r>
-            <a:endParaRPr lang="en-US"/>
           </a:p>
         </p:txBody>
       </p:sp>
@@ -1521,7 +1524,7 @@
           <a:p>
             <a:pPr lvl="0"/>
             <a:r>
-              <a:rPr lang="en-US" smtClean="0"/>
+              <a:rPr lang="en-US"/>
               <a:t>Click to edit Master text styles</a:t>
             </a:r>
           </a:p>
@@ -1577,38 +1580,37 @@
           <a:p>
             <a:pPr lvl="0"/>
             <a:r>
-              <a:rPr lang="en-US" smtClean="0"/>
+              <a:rPr lang="en-US"/>
               <a:t>Click to edit Master text styles</a:t>
             </a:r>
           </a:p>
           <a:p>
             <a:pPr lvl="1"/>
             <a:r>
-              <a:rPr lang="en-US" smtClean="0"/>
+              <a:rPr lang="en-US"/>
               <a:t>Second level</a:t>
             </a:r>
           </a:p>
           <a:p>
             <a:pPr lvl="2"/>
             <a:r>
-              <a:rPr lang="en-US" smtClean="0"/>
+              <a:rPr lang="en-US"/>
               <a:t>Third level</a:t>
             </a:r>
           </a:p>
           <a:p>
             <a:pPr lvl="3"/>
             <a:r>
-              <a:rPr lang="en-US" smtClean="0"/>
+              <a:rPr lang="en-US"/>
               <a:t>Fourth level</a:t>
             </a:r>
           </a:p>
           <a:p>
             <a:pPr lvl="4"/>
             <a:r>
-              <a:rPr lang="en-US" smtClean="0"/>
+              <a:rPr lang="en-US"/>
               <a:t>Fifth level</a:t>
             </a:r>
-            <a:endParaRPr lang="en-US"/>
           </a:p>
         </p:txBody>
       </p:sp>
@@ -1671,7 +1673,7 @@
           <a:p>
             <a:pPr lvl="0"/>
             <a:r>
-              <a:rPr lang="en-US" smtClean="0"/>
+              <a:rPr lang="en-US"/>
               <a:t>Click to edit Master text styles</a:t>
             </a:r>
           </a:p>
@@ -1727,38 +1729,37 @@
           <a:p>
             <a:pPr lvl="0"/>
             <a:r>
-              <a:rPr lang="en-US" smtClean="0"/>
+              <a:rPr lang="en-US"/>
               <a:t>Click to edit Master text styles</a:t>
             </a:r>
           </a:p>
           <a:p>
             <a:pPr lvl="1"/>
             <a:r>
-              <a:rPr lang="en-US" smtClean="0"/>
+              <a:rPr lang="en-US"/>
               <a:t>Second level</a:t>
             </a:r>
           </a:p>
           <a:p>
             <a:pPr lvl="2"/>
             <a:r>
-              <a:rPr lang="en-US" smtClean="0"/>
+              <a:rPr lang="en-US"/>
               <a:t>Third level</a:t>
             </a:r>
           </a:p>
           <a:p>
             <a:pPr lvl="3"/>
             <a:r>
-              <a:rPr lang="en-US" smtClean="0"/>
+              <a:rPr lang="en-US"/>
               <a:t>Fourth level</a:t>
             </a:r>
           </a:p>
           <a:p>
             <a:pPr lvl="4"/>
             <a:r>
-              <a:rPr lang="en-US" smtClean="0"/>
+              <a:rPr lang="en-US"/>
               <a:t>Fifth level</a:t>
             </a:r>
-            <a:endParaRPr lang="en-US"/>
           </a:p>
         </p:txBody>
       </p:sp>
@@ -1779,7 +1780,7 @@
           <a:p>
             <a:fld id="{5BCAD085-E8A6-8845-BD4E-CB4CCA059FC4}" type="datetimeFigureOut">
               <a:rPr lang="en-US" smtClean="0"/>
-              <a:t>1/27/13</a:t>
+              <a:t>7/9/2026</a:t>
             </a:fld>
             <a:endParaRPr lang="en-US"/>
           </a:p>
@@ -1873,10 +1874,9 @@
           <a:lstStyle/>
           <a:p>
             <a:r>
-              <a:rPr lang="en-US" smtClean="0"/>
+              <a:rPr lang="en-US"/>
               <a:t>Click to edit Master title style</a:t>
             </a:r>
-            <a:endParaRPr lang="en-US"/>
           </a:p>
         </p:txBody>
       </p:sp>
@@ -1897,7 +1897,7 @@
           <a:p>
             <a:fld id="{5BCAD085-E8A6-8845-BD4E-CB4CCA059FC4}" type="datetimeFigureOut">
               <a:rPr lang="en-US" smtClean="0"/>
-              <a:t>1/27/13</a:t>
+              <a:t>7/9/2026</a:t>
             </a:fld>
             <a:endParaRPr lang="en-US"/>
           </a:p>
@@ -1992,7 +1992,7 @@
           <a:p>
             <a:fld id="{5BCAD085-E8A6-8845-BD4E-CB4CCA059FC4}" type="datetimeFigureOut">
               <a:rPr lang="en-US" smtClean="0"/>
-              <a:t>1/27/13</a:t>
+              <a:t>7/9/2026</a:t>
             </a:fld>
             <a:endParaRPr lang="en-US"/>
           </a:p>
@@ -2095,10 +2095,9 @@
           </a:lstStyle>
           <a:p>
             <a:r>
-              <a:rPr lang="en-US" smtClean="0"/>
+              <a:rPr lang="en-US"/>
               <a:t>Click to edit Master title style</a:t>
             </a:r>
-            <a:endParaRPr lang="en-US"/>
           </a:p>
         </p:txBody>
       </p:sp>
@@ -2152,38 +2151,37 @@
           <a:p>
             <a:pPr lvl="0"/>
             <a:r>
-              <a:rPr lang="en-US" smtClean="0"/>
+              <a:rPr lang="en-US"/>
               <a:t>Click to edit Master text styles</a:t>
             </a:r>
           </a:p>
           <a:p>
             <a:pPr lvl="1"/>
             <a:r>
-              <a:rPr lang="en-US" smtClean="0"/>
+              <a:rPr lang="en-US"/>
               <a:t>Second level</a:t>
             </a:r>
           </a:p>
           <a:p>
             <a:pPr lvl="2"/>
             <a:r>
-              <a:rPr lang="en-US" smtClean="0"/>
+              <a:rPr lang="en-US"/>
               <a:t>Third level</a:t>
             </a:r>
           </a:p>
           <a:p>
             <a:pPr lvl="3"/>
             <a:r>
-              <a:rPr lang="en-US" smtClean="0"/>
+              <a:rPr lang="en-US"/>
               <a:t>Fourth level</a:t>
             </a:r>
           </a:p>
           <a:p>
             <a:pPr lvl="4"/>
             <a:r>
-              <a:rPr lang="en-US" smtClean="0"/>
+              <a:rPr lang="en-US"/>
               <a:t>Fifth level</a:t>
             </a:r>
-            <a:endParaRPr lang="en-US"/>
           </a:p>
         </p:txBody>
       </p:sp>
@@ -2246,7 +2244,7 @@
           <a:p>
             <a:pPr lvl="0"/>
             <a:r>
-              <a:rPr lang="en-US" smtClean="0"/>
+              <a:rPr lang="en-US"/>
               <a:t>Click to edit Master text styles</a:t>
             </a:r>
           </a:p>
@@ -2269,7 +2267,7 @@
           <a:p>
             <a:fld id="{5BCAD085-E8A6-8845-BD4E-CB4CCA059FC4}" type="datetimeFigureOut">
               <a:rPr lang="en-US" smtClean="0"/>
-              <a:t>1/27/13</a:t>
+              <a:t>7/9/2026</a:t>
             </a:fld>
             <a:endParaRPr lang="en-US"/>
           </a:p>
@@ -2372,10 +2370,9 @@
           </a:lstStyle>
           <a:p>
             <a:r>
-              <a:rPr lang="en-US" smtClean="0"/>
+              <a:rPr lang="en-US"/>
               <a:t>Click to edit Master title style</a:t>
             </a:r>
-            <a:endParaRPr lang="en-US"/>
           </a:p>
         </p:txBody>
       </p:sp>
@@ -2499,7 +2496,7 @@
           <a:p>
             <a:pPr lvl="0"/>
             <a:r>
-              <a:rPr lang="en-US" smtClean="0"/>
+              <a:rPr lang="en-US"/>
               <a:t>Click to edit Master text styles</a:t>
             </a:r>
           </a:p>
@@ -2522,7 +2519,7 @@
           <a:p>
             <a:fld id="{5BCAD085-E8A6-8845-BD4E-CB4CCA059FC4}" type="datetimeFigureOut">
               <a:rPr lang="en-US" smtClean="0"/>
-              <a:t>1/27/13</a:t>
+              <a:t>7/9/2026</a:t>
             </a:fld>
             <a:endParaRPr lang="en-US"/>
           </a:p>
@@ -2631,10 +2628,9 @@
           <a:lstStyle/>
           <a:p>
             <a:r>
-              <a:rPr lang="en-US" smtClean="0"/>
+              <a:rPr lang="en-US"/>
               <a:t>Click to edit Master title style</a:t>
             </a:r>
-            <a:endParaRPr lang="en-US"/>
           </a:p>
         </p:txBody>
       </p:sp>
@@ -2665,38 +2661,37 @@
           <a:p>
             <a:pPr lvl="0"/>
             <a:r>
-              <a:rPr lang="en-US" smtClean="0"/>
+              <a:rPr lang="en-US"/>
               <a:t>Click to edit Master text styles</a:t>
             </a:r>
           </a:p>
           <a:p>
             <a:pPr lvl="1"/>
             <a:r>
-              <a:rPr lang="en-US" smtClean="0"/>
+              <a:rPr lang="en-US"/>
               <a:t>Second level</a:t>
             </a:r>
           </a:p>
           <a:p>
             <a:pPr lvl="2"/>
             <a:r>
-              <a:rPr lang="en-US" smtClean="0"/>
+              <a:rPr lang="en-US"/>
               <a:t>Third level</a:t>
             </a:r>
           </a:p>
           <a:p>
             <a:pPr lvl="3"/>
             <a:r>
-              <a:rPr lang="en-US" smtClean="0"/>
+              <a:rPr lang="en-US"/>
               <a:t>Fourth level</a:t>
             </a:r>
           </a:p>
           <a:p>
             <a:pPr lvl="4"/>
             <a:r>
-              <a:rPr lang="en-US" smtClean="0"/>
+              <a:rPr lang="en-US"/>
               <a:t>Fifth level</a:t>
             </a:r>
-            <a:endParaRPr lang="en-US"/>
           </a:p>
         </p:txBody>
       </p:sp>
@@ -2735,7 +2730,7 @@
           <a:p>
             <a:fld id="{5BCAD085-E8A6-8845-BD4E-CB4CCA059FC4}" type="datetimeFigureOut">
               <a:rPr lang="en-US" smtClean="0"/>
-              <a:t>1/27/13</a:t>
+              <a:t>7/9/2026</a:t>
             </a:fld>
             <a:endParaRPr lang="en-US"/>
           </a:p>
@@ -3148,7 +3143,7 @@
         </p:nvSpPr>
         <p:spPr>
           <a:xfrm>
-            <a:off x="6667500" y="-1905000"/>
+            <a:off x="7579538" y="-2000250"/>
             <a:ext cx="5715000" cy="5715000"/>
           </a:xfrm>
           <a:prstGeom prst="ellipse">
@@ -3170,7 +3165,7 @@
         </p:nvSpPr>
         <p:spPr>
           <a:xfrm>
-            <a:off x="476250" y="3810000"/>
+            <a:off x="-340947" y="3991627"/>
             <a:ext cx="3810000" cy="3810000"/>
           </a:xfrm>
           <a:prstGeom prst="ellipse">
@@ -3192,8 +3187,8 @@
         </p:nvSpPr>
         <p:spPr>
           <a:xfrm rot="900000">
-            <a:off x="4572000" y="1905000"/>
-            <a:ext cx="3048000" cy="3048000"/>
+            <a:off x="9747735" y="5972562"/>
+            <a:ext cx="3048000" cy="979498"/>
           </a:xfrm>
           <a:prstGeom prst="roundRect">
             <a:avLst>
@@ -3455,9 +3450,18 @@
   <p:clrMapOvr>
     <a:masterClrMapping/>
   </p:clrMapOvr>
-  <p:transition xmlns:p14="http://schemas.microsoft.com/office/powerpoint/2010/main" p14:dur="400">
-    <p:fade/>
-  </p:transition>
+  <mc:AlternateContent xmlns:mc="http://schemas.openxmlformats.org/markup-compatibility/2006">
+    <mc:Choice xmlns:p14="http://schemas.microsoft.com/office/powerpoint/2010/main" Requires="p14">
+      <p:transition p14:dur="400">
+        <p:fade/>
+      </p:transition>
+    </mc:Choice>
+    <mc:Fallback>
+      <p:transition>
+        <p:fade/>
+      </p:transition>
+    </mc:Fallback>
+  </mc:AlternateContent>
 </p:sld>
 </file>
 
@@ -3808,7 +3812,7 @@
                 <a:ea typeface="Microsoft YaHei"/>
                 <a:cs typeface="Segoe UI"/>
               </a:rPr>
-              <a:t xml:space="preserve"> CRUD·去重·数量调整·选中结算</a:t>
+              <a:t> CRUD·去重·数量调整·选中结算</a:t>
             </a:r>
           </a:p>
         </p:txBody>
@@ -3859,7 +3863,7 @@
                 <a:ea typeface="Microsoft YaHei"/>
                 <a:cs typeface="Segoe UI"/>
               </a:rPr>
-              <a:t xml:space="preserve"> 发送/接收/会话列表/标记已读/未读计数 5端点</a:t>
+              <a:t> 发送/接收/会话列表/标记已读/未读计数 5端点</a:t>
             </a:r>
           </a:p>
         </p:txBody>
@@ -3910,7 +3914,7 @@
                 <a:ea typeface="Microsoft YaHei"/>
                 <a:cs typeface="Segoe UI"/>
               </a:rPr>
-              <a:t xml:space="preserve"> 列表/标记已读/未读计数 3端点</a:t>
+              <a:t> 列表/标记已读/未读计数 3端点</a:t>
             </a:r>
           </a:p>
         </p:txBody>
@@ -3961,7 +3965,7 @@
                 <a:ea typeface="Microsoft YaHei"/>
                 <a:cs typeface="Segoe UI"/>
               </a:rPr>
-              <a:t xml:space="preserve"> 发消息+订单状态→自动创建通知</a:t>
+              <a:t> 发消息+订单状态→自动创建通知</a:t>
             </a:r>
           </a:p>
         </p:txBody>
@@ -4012,7 +4016,7 @@
                 <a:ea typeface="Microsoft YaHei"/>
                 <a:cs typeface="Segoe UI"/>
               </a:rPr>
-              <a:t xml:space="preserve"> 首页统计·分类树Redis缓存·后台趋势</a:t>
+              <a:t> 首页统计·分类树Redis缓存·后台趋势</a:t>
             </a:r>
           </a:p>
         </p:txBody>
@@ -4175,7 +4179,7 @@
                 <a:ea typeface="Microsoft YaHei"/>
                 <a:cs typeface="Segoe UI"/>
               </a:rPr>
-              <a:t xml:space="preserve"> MIME校验·5MB限制·Docker Volume持久化</a:t>
+              <a:t> MIME校验·5MB限制·Docker Volume持久化</a:t>
             </a:r>
           </a:p>
         </p:txBody>
@@ -4226,7 +4230,7 @@
                 <a:ea typeface="Microsoft YaHei"/>
                 <a:cs typeface="Segoe UI"/>
               </a:rPr>
-              <a:t xml:space="preserve"> 后端多阶段构建（Maven编译+JRE运行）</a:t>
+              <a:t> 后端多阶段构建（Maven编译+JRE运行）</a:t>
             </a:r>
           </a:p>
         </p:txBody>
@@ -4277,7 +4281,7 @@
                 <a:ea typeface="Microsoft YaHei"/>
                 <a:cs typeface="Segoe UI"/>
               </a:rPr>
-              <a:t xml:space="preserve"> Vue3构建+Nginx部署+nginx.conf配置</a:t>
+              <a:t> Vue3构建+Nginx部署+nginx.conf配置</a:t>
             </a:r>
           </a:p>
         </p:txBody>
@@ -4328,7 +4332,7 @@
                 <a:ea typeface="Microsoft YaHei"/>
                 <a:cs typeface="Segoe UI"/>
               </a:rPr>
-              <a:t xml:space="preserve"> MySQL 4脚本自动建库+种子+索引+图片</a:t>
+              <a:t> MySQL 4脚本自动建库+种子+索引+图片</a:t>
             </a:r>
           </a:p>
         </p:txBody>
@@ -4379,7 +4383,7 @@
                 <a:ea typeface="Microsoft YaHei"/>
                 <a:cs typeface="Segoe UI"/>
               </a:rPr>
-              <a:t xml:space="preserve"> 数据库可视化管理工具集成</a:t>
+              <a:t> 数据库可视化管理工具集成</a:t>
             </a:r>
           </a:p>
         </p:txBody>
@@ -4451,9 +4455,18 @@
   <p:clrMapOvr>
     <a:masterClrMapping/>
   </p:clrMapOvr>
-  <p:transition xmlns:p14="http://schemas.microsoft.com/office/powerpoint/2010/main" p14:dur="400">
-    <p:fade/>
-  </p:transition>
+  <mc:AlternateContent xmlns:mc="http://schemas.openxmlformats.org/markup-compatibility/2006">
+    <mc:Choice xmlns:p14="http://schemas.microsoft.com/office/powerpoint/2010/main" Requires="p14">
+      <p:transition p14:dur="400">
+        <p:fade/>
+      </p:transition>
+    </mc:Choice>
+    <mc:Fallback>
+      <p:transition>
+        <p:fade/>
+      </p:transition>
+    </mc:Fallback>
+  </mc:AlternateContent>
 </p:sld>
 </file>
 
@@ -5612,7 +5625,7 @@
                 <a:ea typeface="Microsoft YaHei"/>
                 <a:cs typeface="Segoe UI"/>
               </a:rPr>
-              <a:t xml:space="preserve"> FULLTEXT(title,description) 商品标题+描述全文搜索</a:t>
+              <a:t> FULLTEXT(title,description) 商品标题+描述全文搜索</a:t>
             </a:r>
           </a:p>
         </p:txBody>
@@ -5663,7 +5676,7 @@
                 <a:ea typeface="Microsoft YaHei"/>
                 <a:cs typeface="Segoe UI"/>
               </a:rPr>
-              <a:t xml:space="preserve"> @TableLogic deleted_at 数据可恢复</a:t>
+              <a:t> @TableLogic deleted_at 数据可恢复</a:t>
             </a:r>
           </a:p>
         </p:txBody>
@@ -5714,7 +5727,7 @@
                 <a:ea typeface="Microsoft YaHei"/>
                 <a:cs typeface="Segoe UI"/>
               </a:rPr>
-              <a:t xml:space="preserve"> utf8mb4 完整支持中文+Emoji</a:t>
+              <a:t> utf8mb4 完整支持中文+Emoji</a:t>
             </a:r>
           </a:p>
         </p:txBody>
@@ -5765,7 +5778,7 @@
                 <a:ea typeface="Microsoft YaHei"/>
                 <a:cs typeface="Segoe UI"/>
               </a:rPr>
-              <a:t xml:space="preserve"> 批量加载分类名+卖家信息 1次JOIN</a:t>
+              <a:t> 批量加载分类名+卖家信息 1次JOIN</a:t>
             </a:r>
           </a:p>
         </p:txBody>
@@ -6429,9 +6442,18 @@
   <p:clrMapOvr>
     <a:masterClrMapping/>
   </p:clrMapOvr>
-  <p:transition xmlns:p14="http://schemas.microsoft.com/office/powerpoint/2010/main" p14:dur="400">
-    <p:fade/>
-  </p:transition>
+  <mc:AlternateContent xmlns:mc="http://schemas.openxmlformats.org/markup-compatibility/2006">
+    <mc:Choice xmlns:p14="http://schemas.microsoft.com/office/powerpoint/2010/main" Requires="p14">
+      <p:transition p14:dur="400">
+        <p:fade/>
+      </p:transition>
+    </mc:Choice>
+    <mc:Fallback>
+      <p:transition>
+        <p:fade/>
+      </p:transition>
+    </mc:Fallback>
+  </mc:AlternateContent>
 </p:sld>
 </file>
 
@@ -7414,7 +7436,7 @@
                 <a:ea typeface="Microsoft YaHei"/>
                 <a:cs typeface="Segoe UI"/>
               </a:rPr>
-              <a:t xml:space="preserve"> 验证码类型隔离·密码重置Token提前消费·旧Token全站403·Docker时区偏移8小时</a:t>
+              <a:t> 验证码类型隔离·密码重置Token提前消费·旧Token全站403·Docker时区偏移8小时</a:t>
             </a:r>
           </a:p>
         </p:txBody>
@@ -7465,7 +7487,7 @@
                 <a:ea typeface="Microsoft YaHei"/>
                 <a:cs typeface="Segoe UI"/>
               </a:rPr>
-              <a:t xml:space="preserve"> 卖家浏览量误计·商品图片多次迭代·物流录入流程·消息实时刷新</a:t>
+              <a:t> 卖家浏览量误计·商品图片多次迭代·物流录入流程·消息实时刷新</a:t>
             </a:r>
           </a:p>
         </p:txBody>
@@ -7516,7 +7538,7 @@
                 <a:ea typeface="Microsoft YaHei"/>
                 <a:cs typeface="Segoe UI"/>
               </a:rPr>
-              <a:t xml:space="preserve"> N+1查询→批量JOIN·分类树Redis缓存·ECharts dispose防泄漏·骨架屏加载</a:t>
+              <a:t> N+1查询→批量JOIN·分类树Redis缓存·ECharts dispose防泄漏·骨架屏加载</a:t>
             </a:r>
           </a:p>
         </p:txBody>
@@ -7588,9 +7610,18 @@
   <p:clrMapOvr>
     <a:masterClrMapping/>
   </p:clrMapOvr>
-  <p:transition xmlns:p14="http://schemas.microsoft.com/office/powerpoint/2010/main" p14:dur="400">
-    <p:fade/>
-  </p:transition>
+  <mc:AlternateContent xmlns:mc="http://schemas.openxmlformats.org/markup-compatibility/2006">
+    <mc:Choice xmlns:p14="http://schemas.microsoft.com/office/powerpoint/2010/main" Requires="p14">
+      <p:transition p14:dur="400">
+        <p:fade/>
+      </p:transition>
+    </mc:Choice>
+    <mc:Fallback>
+      <p:transition>
+        <p:fade/>
+      </p:transition>
+    </mc:Fallback>
+  </mc:AlternateContent>
 </p:sld>
 </file>
 
@@ -8813,7 +8844,7 @@
                 <a:ea typeface="Microsoft YaHei"/>
                 <a:cs typeface="Segoe UI"/>
               </a:rPr>
-              <a:t xml:space="preserve"> 每 5 秒自动拉取当前会话新消息，无需手动刷新页面</a:t>
+              <a:t> 每 5 秒自动拉取当前会话新消息，无需手动刷新页面</a:t>
             </a:r>
           </a:p>
         </p:txBody>
@@ -8864,7 +8895,7 @@
                 <a:ea typeface="Microsoft YaHei"/>
                 <a:cs typeface="Segoe UI"/>
               </a:rPr>
-              <a:t xml:space="preserve"> 每 30 秒自动更新未读消息数+通知数+铃铛红点</a:t>
+              <a:t> 每 30 秒自动更新未读消息数+通知数+铃铛红点</a:t>
             </a:r>
           </a:p>
         </p:txBody>
@@ -8915,7 +8946,7 @@
                 <a:ea typeface="Microsoft YaHei"/>
                 <a:cs typeface="Segoe UI"/>
               </a:rPr>
-              <a:t xml:space="preserve"> 商品详情页联系卖家 → /message?to=userId 自动打开聊天窗口</a:t>
+              <a:t> 商品详情页联系卖家 → /message?to=userId 自动打开聊天窗口</a:t>
             </a:r>
           </a:p>
         </p:txBody>
@@ -8987,9 +9018,18 @@
   <p:clrMapOvr>
     <a:masterClrMapping/>
   </p:clrMapOvr>
-  <p:transition xmlns:p14="http://schemas.microsoft.com/office/powerpoint/2010/main" p14:dur="400">
-    <p:fade/>
-  </p:transition>
+  <mc:AlternateContent xmlns:mc="http://schemas.openxmlformats.org/markup-compatibility/2006">
+    <mc:Choice xmlns:p14="http://schemas.microsoft.com/office/powerpoint/2010/main" Requires="p14">
+      <p:transition p14:dur="400">
+        <p:fade/>
+      </p:transition>
+    </mc:Choice>
+    <mc:Fallback>
+      <p:transition>
+        <p:fade/>
+      </p:transition>
+    </mc:Fallback>
+  </mc:AlternateContent>
 </p:sld>
 </file>
 
@@ -10188,7 +10228,7 @@
                 <a:ea typeface="Microsoft YaHei"/>
                 <a:cs typeface="Segoe UI"/>
               </a:rPr>
-              <a:t xml:space="preserve"> — 多请求并发 401 只发一次刷新，其余排队 | </a:t>
+              <a:t> — 多请求并发 401 只发一次刷新，其余排队 | </a:t>
             </a:r>
             <a:r>
               <a:rPr lang="zh-CN" sz="1200" b="1" dirty="0">
@@ -10210,7 +10250,7 @@
                 <a:ea typeface="Microsoft YaHei"/>
                 <a:cs typeface="Segoe UI"/>
               </a:rPr>
-              <a:t xml:space="preserve"> — 类型隔离 + 频率限制 + 防消费</a:t>
+              <a:t> — 类型隔离 + 频率限制 + 防消费</a:t>
             </a:r>
           </a:p>
         </p:txBody>
@@ -10261,7 +10301,7 @@
                 <a:ea typeface="Microsoft YaHei"/>
                 <a:cs typeface="Segoe UI"/>
               </a:rPr>
-              <a:t xml:space="preserve"> — selectForUpdate 防双重出售 | </a:t>
+              <a:t> — selectForUpdate 防双重出售 | </a:t>
             </a:r>
             <a:r>
               <a:rPr lang="zh-CN" sz="1200" b="1" dirty="0">
@@ -10283,7 +10323,7 @@
                 <a:ea typeface="Microsoft YaHei"/>
                 <a:cs typeface="Segoe UI"/>
               </a:rPr>
-              <a:t xml:space="preserve"> — 分类名+卖家信息 1次JOIN | </a:t>
+              <a:t> — 分类名+卖家信息 1次JOIN | </a:t>
             </a:r>
             <a:r>
               <a:rPr lang="zh-CN" sz="1200" b="1" dirty="0">
@@ -10305,7 +10345,7 @@
                 <a:ea typeface="Microsoft YaHei"/>
                 <a:cs typeface="Segoe UI"/>
               </a:rPr>
-              <a:t xml:space="preserve"> — 五容器自动初始化</a:t>
+              <a:t> — 五容器自动初始化</a:t>
             </a:r>
           </a:p>
         </p:txBody>
@@ -10377,9 +10417,18 @@
   <p:clrMapOvr>
     <a:masterClrMapping/>
   </p:clrMapOvr>
-  <p:transition xmlns:p14="http://schemas.microsoft.com/office/powerpoint/2010/main" p14:dur="400">
-    <p:fade/>
-  </p:transition>
+  <mc:AlternateContent xmlns:mc="http://schemas.openxmlformats.org/markup-compatibility/2006">
+    <mc:Choice xmlns:p14="http://schemas.microsoft.com/office/powerpoint/2010/main" Requires="p14">
+      <p:transition p14:dur="400">
+        <p:fade/>
+      </p:transition>
+    </mc:Choice>
+    <mc:Fallback>
+      <p:transition>
+        <p:fade/>
+      </p:transition>
+    </mc:Fallback>
+  </mc:AlternateContent>
 </p:sld>
 </file>
 
@@ -11082,7 +11131,7 @@
                 <a:ea typeface="Segoe UI"/>
                 <a:cs typeface="Segoe UI"/>
               </a:rPr>
-              <a:t xml:space="preserve"> Vue3+TS+Vite5+ElementPlus+Pinia+ECharts</a:t>
+              <a:t> Vue3+TS+Vite5+ElementPlus+Pinia+ECharts</a:t>
             </a:r>
           </a:p>
         </p:txBody>
@@ -11133,7 +11182,7 @@
                 <a:ea typeface="Segoe UI"/>
                 <a:cs typeface="Segoe UI"/>
               </a:rPr>
-              <a:t xml:space="preserve"> SpringBoot3.2+MyBatisPlus+Security+JWT+Knife4j</a:t>
+              <a:t> SpringBoot3.2+MyBatisPlus+Security+JWT+Knife4j</a:t>
             </a:r>
           </a:p>
         </p:txBody>
@@ -11184,7 +11233,7 @@
                 <a:ea typeface="Microsoft YaHei"/>
                 <a:cs typeface="Segoe UI"/>
               </a:rPr>
-              <a:t xml:space="preserve"> MySQL8.0(13表)+Redis7+全文索引+软删除</a:t>
+              <a:t> MySQL8.0(13表)+Redis7+全文索引+软删除</a:t>
             </a:r>
           </a:p>
         </p:txBody>
@@ -11235,7 +11284,7 @@
                 <a:ea typeface="Microsoft YaHei"/>
                 <a:cs typeface="Segoe UI"/>
               </a:rPr>
-              <a:t xml:space="preserve"> Docker Compose 五容器+一键启动+健康检查</a:t>
+              <a:t> Docker Compose 五容器+一键启动+健康检查</a:t>
             </a:r>
           </a:p>
         </p:txBody>
@@ -11286,7 +11335,7 @@
                 <a:ea typeface="Microsoft YaHei"/>
                 <a:cs typeface="Segoe UI"/>
               </a:rPr>
-              <a:t xml:space="preserve"> JWT双Token+BCrypt+RBAC+验证码隔离+频率限制</a:t>
+              <a:t> JWT双Token+BCrypt+RBAC+验证码隔离+频率限制</a:t>
             </a:r>
           </a:p>
         </p:txBody>
@@ -11337,7 +11386,7 @@
                 <a:ea typeface="Microsoft YaHei"/>
                 <a:cs typeface="Segoe UI"/>
               </a:rPr>
-              <a:t xml:space="preserve"> JUnit14+Postman30++Vitest8 全部通过</a:t>
+              <a:t> JUnit14+Postman30++Vitest8 全部通过</a:t>
             </a:r>
           </a:p>
         </p:txBody>
@@ -11500,7 +11549,7 @@
                 <a:ea typeface="Microsoft YaHei"/>
                 <a:cs typeface="Segoe UI"/>
               </a:rPr>
-              <a:t xml:space="preserve"> 浏览→沟通→下单→支付→发货→收货→评价</a:t>
+              <a:t> 浏览→沟通→下单→支付→发货→收货→评价</a:t>
             </a:r>
           </a:p>
         </p:txBody>
@@ -11551,7 +11600,7 @@
                 <a:ea typeface="Microsoft YaHei"/>
                 <a:cs typeface="Segoe UI"/>
               </a:rPr>
-              <a:t xml:space="preserve"> 5s轮询聊天+30s轮询通知+订单自动推送</a:t>
+              <a:t> 5s轮询聊天+30s轮询通知+订单自动推送</a:t>
             </a:r>
           </a:p>
         </p:txBody>
@@ -11602,7 +11651,7 @@
                 <a:ea typeface="Microsoft YaHei"/>
                 <a:cs typeface="Segoe UI"/>
               </a:rPr>
-              <a:t xml:space="preserve"> 骨架屏+过渡动画+微交互+令牌体系</a:t>
+              <a:t> 骨架屏+过渡动画+微交互+令牌体系</a:t>
             </a:r>
           </a:p>
         </p:txBody>
@@ -11653,7 +11702,7 @@
                 <a:ea typeface="Microsoft YaHei"/>
                 <a:cs typeface="Segoe UI"/>
               </a:rPr>
-              <a:t xml:space="preserve"> 三级权限+验证码隔离+频率限制</a:t>
+              <a:t> 三级权限+验证码隔离+频率限制</a:t>
             </a:r>
           </a:p>
         </p:txBody>
@@ -11704,7 +11753,7 @@
                 <a:ea typeface="Microsoft YaHei"/>
                 <a:cs typeface="Segoe UI"/>
               </a:rPr>
-              <a:t xml:space="preserve"> 五容器一键部署+自动初始4脚本</a:t>
+              <a:t> 五容器一键部署+自动初始4脚本</a:t>
             </a:r>
           </a:p>
         </p:txBody>
@@ -11755,7 +11804,7 @@
                 <a:ea typeface="Microsoft YaHei"/>
                 <a:cs typeface="Segoe UI"/>
               </a:rPr>
-              <a:t xml:space="preserve"> 7份SE文档+16页答辩PPT</a:t>
+              <a:t> 7份SE文档+16页答辩PPT</a:t>
             </a:r>
           </a:p>
         </p:txBody>
@@ -11891,9 +11940,18 @@
   <p:clrMapOvr>
     <a:masterClrMapping/>
   </p:clrMapOvr>
-  <p:transition xmlns:p14="http://schemas.microsoft.com/office/powerpoint/2010/main" p14:dur="400">
-    <p:fade/>
-  </p:transition>
+  <mc:AlternateContent xmlns:mc="http://schemas.openxmlformats.org/markup-compatibility/2006">
+    <mc:Choice xmlns:p14="http://schemas.microsoft.com/office/powerpoint/2010/main" Requires="p14">
+      <p:transition p14:dur="400">
+        <p:fade/>
+      </p:transition>
+    </mc:Choice>
+    <mc:Fallback>
+      <p:transition>
+        <p:fade/>
+      </p:transition>
+    </mc:Fallback>
+  </mc:AlternateContent>
 </p:sld>
 </file>
 
@@ -11952,7 +12010,7 @@
         </p:nvSpPr>
         <p:spPr>
           <a:xfrm>
-            <a:off x="6667500" y="-1905000"/>
+            <a:off x="7967243" y="-1595561"/>
             <a:ext cx="5715000" cy="5715000"/>
           </a:xfrm>
           <a:prstGeom prst="ellipse">
@@ -11965,6 +12023,13 @@
             <a:noFill/>
           </a:ln>
         </p:spPr>
+        <p:txBody>
+          <a:bodyPr/>
+          <a:lstStyle/>
+          <a:p>
+            <a:endParaRPr lang="zh-CN" altLang="en-US" dirty="0"/>
+          </a:p>
+        </p:txBody>
       </p:sp>
       <p:sp>
         <p:nvSpPr>
@@ -11974,7 +12039,7 @@
         </p:nvSpPr>
         <p:spPr>
           <a:xfrm>
-            <a:off x="476250" y="3810000"/>
+            <a:off x="173622" y="3862864"/>
             <a:ext cx="3810000" cy="3810000"/>
           </a:xfrm>
           <a:prstGeom prst="ellipse">
@@ -11987,6 +12052,13 @@
             <a:noFill/>
           </a:ln>
         </p:spPr>
+        <p:txBody>
+          <a:bodyPr/>
+          <a:lstStyle/>
+          <a:p>
+            <a:endParaRPr lang="zh-CN" altLang="en-US" dirty="0"/>
+          </a:p>
+        </p:txBody>
       </p:sp>
       <p:pic>
         <p:nvPicPr>
@@ -12235,9 +12307,18 @@
   <p:clrMapOvr>
     <a:masterClrMapping/>
   </p:clrMapOvr>
-  <p:transition xmlns:p14="http://schemas.microsoft.com/office/powerpoint/2010/main" p14:dur="400">
-    <p:fade/>
-  </p:transition>
+  <mc:AlternateContent xmlns:mc="http://schemas.openxmlformats.org/markup-compatibility/2006">
+    <mc:Choice xmlns:p14="http://schemas.microsoft.com/office/powerpoint/2010/main" Requires="p14">
+      <p:transition p14:dur="400">
+        <p:fade/>
+      </p:transition>
+    </mc:Choice>
+    <mc:Fallback>
+      <p:transition>
+        <p:fade/>
+      </p:transition>
+    </mc:Fallback>
+  </mc:AlternateContent>
 </p:sld>
 </file>
 
@@ -13793,9 +13874,18 @@
   <p:clrMapOvr>
     <a:masterClrMapping/>
   </p:clrMapOvr>
-  <p:transition xmlns:p14="http://schemas.microsoft.com/office/powerpoint/2010/main" p14:dur="400">
-    <p:fade/>
-  </p:transition>
+  <mc:AlternateContent xmlns:mc="http://schemas.openxmlformats.org/markup-compatibility/2006">
+    <mc:Choice xmlns:p14="http://schemas.microsoft.com/office/powerpoint/2010/main" Requires="p14">
+      <p:transition p14:dur="400">
+        <p:fade/>
+      </p:transition>
+    </mc:Choice>
+    <mc:Fallback>
+      <p:transition>
+        <p:fade/>
+      </p:transition>
+    </mc:Fallback>
+  </mc:AlternateContent>
 </p:sld>
 </file>
 
@@ -15745,9 +15835,18 @@
   <p:clrMapOvr>
     <a:masterClrMapping/>
   </p:clrMapOvr>
-  <p:transition xmlns:p14="http://schemas.microsoft.com/office/powerpoint/2010/main" p14:dur="400">
-    <p:fade/>
-  </p:transition>
+  <mc:AlternateContent xmlns:mc="http://schemas.openxmlformats.org/markup-compatibility/2006">
+    <mc:Choice xmlns:p14="http://schemas.microsoft.com/office/powerpoint/2010/main" Requires="p14">
+      <p:transition p14:dur="400">
+        <p:fade/>
+      </p:transition>
+    </mc:Choice>
+    <mc:Fallback>
+      <p:transition>
+        <p:fade/>
+      </p:transition>
+    </mc:Fallback>
+  </mc:AlternateContent>
 </p:sld>
 </file>
 
@@ -16034,7 +16133,7 @@
                 <a:ea typeface="Segoe UI"/>
                 <a:cs typeface="Segoe UI"/>
               </a:rPr>
-              <a:t xml:space="preserve"> Vue 3 + TypeScript + Vite 5</a:t>
+              <a:t> Vue 3 + TypeScript + Vite 5</a:t>
             </a:r>
           </a:p>
         </p:txBody>
@@ -16085,7 +16184,7 @@
                 <a:ea typeface="Segoe UI"/>
                 <a:cs typeface="Segoe UI"/>
               </a:rPr>
-              <a:t xml:space="preserve"> Element Plus + Pinia + Router</a:t>
+              <a:t> Element Plus + Pinia + Router</a:t>
             </a:r>
           </a:p>
         </p:txBody>
@@ -16136,7 +16235,7 @@
                 <a:ea typeface="Microsoft YaHei"/>
                 <a:cs typeface="Segoe UI"/>
               </a:rPr>
-              <a:t xml:space="preserve"> Axios + Token 自动刷新队列</a:t>
+              <a:t> Axios + Token 自动刷新队列</a:t>
             </a:r>
           </a:p>
         </p:txBody>
@@ -16187,7 +16286,7 @@
                 <a:ea typeface="Microsoft YaHei"/>
                 <a:cs typeface="Segoe UI"/>
               </a:rPr>
-              <a:t xml:space="preserve"> ECharts 5 + CSS 设计令牌</a:t>
+              <a:t> ECharts 5 + CSS 设计令牌</a:t>
             </a:r>
           </a:p>
         </p:txBody>
@@ -16238,7 +16337,7 @@
                 <a:ea typeface="Microsoft YaHei"/>
                 <a:cs typeface="Segoe UI"/>
               </a:rPr>
-              <a:t xml:space="preserve"> Vite → Nginx :3000 部署</a:t>
+              <a:t> Vite → Nginx :3000 部署</a:t>
             </a:r>
           </a:p>
         </p:txBody>
@@ -16481,7 +16580,7 @@
                 <a:ea typeface="Segoe UI"/>
                 <a:cs typeface="Segoe UI"/>
               </a:rPr>
-              <a:t xml:space="preserve"> SpringBoot 3.2 + MyBatis-Plus</a:t>
+              <a:t> SpringBoot 3.2 + MyBatis-Plus</a:t>
             </a:r>
           </a:p>
         </p:txBody>
@@ -16532,7 +16631,7 @@
                 <a:ea typeface="Segoe UI"/>
                 <a:cs typeface="Segoe UI"/>
               </a:rPr>
-              <a:t xml:space="preserve"> Spring Security + JWT + BCrypt</a:t>
+              <a:t> Spring Security + JWT + BCrypt</a:t>
             </a:r>
           </a:p>
         </p:txBody>
@@ -16583,7 +16682,7 @@
                 <a:ea typeface="Microsoft YaHei"/>
                 <a:cs typeface="Segoe UI"/>
               </a:rPr>
-              <a:t xml:space="preserve"> MySQL 8.0 + Redis 7 + 13 张表</a:t>
+              <a:t> MySQL 8.0 + Redis 7 + 13 张表</a:t>
             </a:r>
           </a:p>
         </p:txBody>
@@ -16634,7 +16733,7 @@
                 <a:ea typeface="Microsoft YaHei"/>
                 <a:cs typeface="Segoe UI"/>
               </a:rPr>
-              <a:t xml:space="preserve"> RESTful 30+ 端点 + Knife4j</a:t>
+              <a:t> RESTful 30+ 端点 + Knife4j</a:t>
             </a:r>
           </a:p>
         </p:txBody>
@@ -16685,7 +16784,7 @@
                 <a:ea typeface="Segoe UI"/>
                 <a:cs typeface="Segoe UI"/>
               </a:rPr>
-              <a:t xml:space="preserve"> Docker → Tomcat :8080</a:t>
+              <a:t> Docker → Tomcat :8080</a:t>
             </a:r>
           </a:p>
         </p:txBody>
@@ -17400,7 +17499,7 @@
                 <a:ea typeface="Microsoft YaHei"/>
                 <a:cs typeface="Segoe UI"/>
               </a:rPr>
-              <a:t xml:space="preserve"> — Access Token 2h + Refresh Token 7d，请求队列防并发刷新</a:t>
+              <a:t> — Access Token 2h + Refresh Token 7d，请求队列防并发刷新</a:t>
             </a:r>
           </a:p>
         </p:txBody>
@@ -17451,7 +17550,7 @@
                 <a:ea typeface="Microsoft YaHei"/>
                 <a:cs typeface="Segoe UI"/>
               </a:rPr>
-              <a:t xml:space="preserve"> — 公开接口 / 认证接口 / ROLE_ADMIN 三级权限，CORS 白名单</a:t>
+              <a:t> — 公开接口 / 认证接口 / ROLE_ADMIN 三级权限，CORS 白名单</a:t>
             </a:r>
           </a:p>
         </p:txBody>
@@ -17502,7 +17601,7 @@
                 <a:ea typeface="Microsoft YaHei"/>
                 <a:cs typeface="Segoe UI"/>
               </a:rPr>
-              <a:t xml:space="preserve"> — 类型隔离（注册/重置互斥）+ 频率限制 + 防消费</a:t>
+              <a:t> — 类型隔离（注册/重置互斥）+ 频率限制 + 防消费</a:t>
             </a:r>
           </a:p>
         </p:txBody>
@@ -17553,7 +17652,7 @@
                 <a:ea typeface="Microsoft YaHei"/>
                 <a:cs typeface="Segoe UI"/>
               </a:rPr>
-              <a:t xml:space="preserve"> — BCrypt 密码哈希 · XSS 过滤 · MIME 校验 · 敏感信息脱敏</a:t>
+              <a:t> — BCrypt 密码哈希 · XSS 过滤 · MIME 校验 · 敏感信息脱敏</a:t>
             </a:r>
           </a:p>
         </p:txBody>
@@ -17625,9 +17724,18 @@
   <p:clrMapOvr>
     <a:masterClrMapping/>
   </p:clrMapOvr>
-  <p:transition xmlns:p14="http://schemas.microsoft.com/office/powerpoint/2010/main" p14:dur="400">
-    <p:fade/>
-  </p:transition>
+  <mc:AlternateContent xmlns:mc="http://schemas.openxmlformats.org/markup-compatibility/2006">
+    <mc:Choice xmlns:p14="http://schemas.microsoft.com/office/powerpoint/2010/main" Requires="p14">
+      <p:transition p14:dur="400">
+        <p:fade/>
+      </p:transition>
+    </mc:Choice>
+    <mc:Fallback>
+      <p:transition>
+        <p:fade/>
+      </p:transition>
+    </mc:Fallback>
+  </mc:AlternateContent>
 </p:sld>
 </file>
 
@@ -19601,9 +19709,18 @@
   <p:clrMapOvr>
     <a:masterClrMapping/>
   </p:clrMapOvr>
-  <p:transition xmlns:p14="http://schemas.microsoft.com/office/powerpoint/2010/main" p14:dur="400">
-    <p:fade/>
-  </p:transition>
+  <mc:AlternateContent xmlns:mc="http://schemas.openxmlformats.org/markup-compatibility/2006">
+    <mc:Choice xmlns:p14="http://schemas.microsoft.com/office/powerpoint/2010/main" Requires="p14">
+      <p:transition p14:dur="400">
+        <p:fade/>
+      </p:transition>
+    </mc:Choice>
+    <mc:Fallback>
+      <p:transition>
+        <p:fade/>
+      </p:transition>
+    </mc:Fallback>
+  </mc:AlternateContent>
 </p:sld>
 </file>
 
@@ -19954,7 +20071,7 @@
                 <a:ea typeface="Microsoft YaHei"/>
                 <a:cs typeface="Segoe UI"/>
               </a:rPr>
-              <a:t xml:space="preserve"> MySQL + Redis + SpringBoot + Nginx + phpMyAdmin 五容器</a:t>
+              <a:t> MySQL + Redis + SpringBoot + Nginx + phpMyAdmin 五容器</a:t>
             </a:r>
           </a:p>
         </p:txBody>
@@ -20005,7 +20122,7 @@
                 <a:ea typeface="Microsoft YaHei"/>
                 <a:cs typeface="Segoe UI"/>
               </a:rPr>
-              <a:t xml:space="preserve"> Nginx 反向代理 /api/* → backend + Gzip + 限流 30r/s</a:t>
+              <a:t> Nginx 反向代理 /api/* → backend + Gzip + 限流 30r/s</a:t>
             </a:r>
           </a:p>
         </p:txBody>
@@ -20056,7 +20173,7 @@
                 <a:ea typeface="Microsoft YaHei"/>
                 <a:cs typeface="Segoe UI"/>
               </a:rPr>
-              <a:t xml:space="preserve"> MySQL/Redis healthy 后才启动后端，保障启动顺序</a:t>
+              <a:t> MySQL/Redis healthy 后才启动后端，保障启动顺序</a:t>
             </a:r>
           </a:p>
         </p:txBody>
@@ -20107,7 +20224,7 @@
                 <a:ea typeface="Microsoft YaHei"/>
                 <a:cs typeface="Segoe UI"/>
               </a:rPr>
-              <a:t xml:space="preserve"> mysql_data / redis_data / upload_data 三个 Volume</a:t>
+              <a:t> mysql_data / redis_data / upload_data 三个 Volume</a:t>
             </a:r>
           </a:p>
         </p:txBody>
@@ -20158,7 +20275,7 @@
                 <a:ea typeface="Microsoft YaHei"/>
                 <a:cs typeface="Segoe UI"/>
               </a:rPr>
-              <a:t xml:space="preserve"> TZ=Asia/Shanghai 解决 UTC 偏移 8 小时</a:t>
+              <a:t> TZ=Asia/Shanghai 解决 UTC 偏移 8 小时</a:t>
             </a:r>
           </a:p>
         </p:txBody>
@@ -20209,7 +20326,7 @@
                 <a:ea typeface="Microsoft YaHei"/>
                 <a:cs typeface="Segoe UI"/>
               </a:rPr>
-              <a:t xml:space="preserve"> dev/prod/test + .env 敏感信息不入库</a:t>
+              <a:t> dev/prod/test + .env 敏感信息不入库</a:t>
             </a:r>
           </a:p>
         </p:txBody>
@@ -20372,7 +20489,7 @@
                 <a:ea typeface="Microsoft YaHei"/>
                 <a:cs typeface="Segoe UI"/>
               </a:rPr>
-              <a:t xml:space="preserve"> 7 天计划 · 80+ 任务分解 · 5 人角色分配</a:t>
+              <a:t> 7 天计划 · 80+ 任务分解 · 5 人角色分配</a:t>
             </a:r>
           </a:p>
         </p:txBody>
@@ -20423,7 +20540,7 @@
                 <a:ea typeface="Microsoft YaHei"/>
                 <a:cs typeface="Segoe UI"/>
               </a:rPr>
-              <a:t xml:space="preserve"> 5 页面：用户/商品审核/订单/统计/公告</a:t>
+              <a:t> 5 页面：用户/商品审核/订单/统计/公告</a:t>
             </a:r>
           </a:p>
         </p:txBody>
@@ -20474,7 +20591,7 @@
                 <a:ea typeface="Microsoft YaHei"/>
                 <a:cs typeface="Segoe UI"/>
               </a:rPr>
-              <a:t xml:space="preserve"> 30+ 接口测试 · 覆盖 7 大模块</a:t>
+              <a:t> 30+ 接口测试 · 覆盖 7 大模块</a:t>
             </a:r>
           </a:p>
         </p:txBody>
@@ -20525,7 +20642,7 @@
                 <a:ea typeface="Microsoft YaHei"/>
                 <a:cs typeface="Segoe UI"/>
               </a:rPr>
-              <a:t xml:space="preserve"> 14 后端单元测试 · 全部通过</a:t>
+              <a:t> 14 后端单元测试 · 全部通过</a:t>
             </a:r>
           </a:p>
         </p:txBody>
@@ -20576,7 +20693,7 @@
                 <a:ea typeface="Microsoft YaHei"/>
                 <a:cs typeface="Segoe UI"/>
               </a:rPr>
-              <a:t xml:space="preserve"> 7 份软件工程文档（需求·架构·数据库·接口·测试·手册·日报）</a:t>
+              <a:t> 7 份软件工程文档（需求·架构·数据库·接口·测试·手册·日报）</a:t>
             </a:r>
           </a:p>
         </p:txBody>
@@ -20627,7 +20744,7 @@
                 <a:ea typeface="Microsoft YaHei"/>
                 <a:cs typeface="Segoe UI"/>
               </a:rPr>
-              <a:t xml:space="preserve"> Git · 15+ commits · 合并冲突解决</a:t>
+              <a:t> Git · 15+ commits · 合并冲突解决</a:t>
             </a:r>
           </a:p>
         </p:txBody>
@@ -20763,9 +20880,18 @@
   <p:clrMapOvr>
     <a:masterClrMapping/>
   </p:clrMapOvr>
-  <p:transition xmlns:p14="http://schemas.microsoft.com/office/powerpoint/2010/main" p14:dur="400">
-    <p:fade/>
-  </p:transition>
+  <mc:AlternateContent xmlns:mc="http://schemas.openxmlformats.org/markup-compatibility/2006">
+    <mc:Choice xmlns:p14="http://schemas.microsoft.com/office/powerpoint/2010/main" Requires="p14">
+      <p:transition p14:dur="400">
+        <p:fade/>
+      </p:transition>
+    </mc:Choice>
+    <mc:Fallback>
+      <p:transition>
+        <p:fade/>
+      </p:transition>
+    </mc:Fallback>
+  </mc:AlternateContent>
 </p:sld>
 </file>
 
@@ -21116,7 +21242,7 @@
                 <a:ea typeface="Microsoft YaHei"/>
                 <a:cs typeface="Segoe UI"/>
               </a:rPr>
-              <a:t xml:space="preserve"> Vue3+TS+Vite · CSS 令牌 15 变量 · Element Plus 全局覆盖</a:t>
+              <a:t> Vue3+TS+Vite · CSS 令牌 15 变量 · Element Plus 全局覆盖</a:t>
             </a:r>
           </a:p>
         </p:txBody>
@@ -21167,7 +21293,7 @@
                 <a:ea typeface="Microsoft YaHei"/>
                 <a:cs typeface="Segoe UI"/>
               </a:rPr>
-              <a:t xml:space="preserve"> 登录·注册·找回密码 · Token 队列自动刷新</a:t>
+              <a:t> 登录·注册·找回密码 · Token 队列自动刷新</a:t>
             </a:r>
           </a:p>
         </p:txBody>
@@ -21218,7 +21344,7 @@
                 <a:ea typeface="Microsoft YaHei"/>
                 <a:cs typeface="Segoe UI"/>
               </a:rPr>
-              <a:t xml:space="preserve"> 双栏聊天·5s轮询·?to=userId 自动开聊</a:t>
+              <a:t> 双栏聊天·5s轮询·?to=userId 自动开聊</a:t>
             </a:r>
           </a:p>
         </p:txBody>
@@ -21269,7 +21395,7 @@
                 <a:ea typeface="Microsoft YaHei"/>
                 <a:cs typeface="Segoe UI"/>
               </a:rPr>
-              <a:t xml:space="preserve"> 铃铛+Popover+可点击跳转+30s轮询</a:t>
+              <a:t> 铃铛+Popover+可点击跳转+30s轮询</a:t>
             </a:r>
           </a:p>
         </p:txBody>
@@ -21320,7 +21446,7 @@
                 <a:ea typeface="Microsoft YaHei"/>
                 <a:cs typeface="Segoe UI"/>
               </a:rPr>
-              <a:t xml:space="preserve"> 买家卖家双视角 · 发货·收货·评价全流程</a:t>
+              <a:t> 买家卖家双视角 · 发货·收货·评价全流程</a:t>
             </a:r>
           </a:p>
         </p:txBody>
@@ -21371,7 +21497,7 @@
                 <a:ea typeface="Microsoft YaHei"/>
                 <a:cs typeface="Segoe UI"/>
               </a:rPr>
-              <a:t xml:space="preserve"> 验证码隔离·防暴力破解·防消费·浏览量修正</a:t>
+              <a:t> 验证码隔离·防暴力破解·防消费·浏览量修正</a:t>
             </a:r>
           </a:p>
         </p:txBody>
@@ -21534,7 +21660,7 @@
                 <a:ea typeface="Microsoft YaHei"/>
                 <a:cs typeface="Segoe UI"/>
               </a:rPr>
-              <a:t xml:space="preserve"> fade/slide 路由切换 · mode=out-in</a:t>
+              <a:t> fade/slide 路由切换 · mode=out-in</a:t>
             </a:r>
           </a:p>
         </p:txBody>
@@ -21585,7 +21711,7 @@
                 <a:ea typeface="Microsoft YaHei"/>
                 <a:cs typeface="Segoe UI"/>
               </a:rPr>
-              <a:t xml:space="preserve"> Shimmer 1.5s 循环·8 卡片占位</a:t>
+              <a:t> Shimmer 1.5s 循环·8 卡片占位</a:t>
             </a:r>
           </a:p>
         </p:txBody>
@@ -21636,7 +21762,7 @@
                 <a:ea typeface="Microsoft YaHei"/>
                 <a:cs typeface="Segoe UI"/>
               </a:rPr>
-              <a:t xml:space="preserve"> 400px 弹性出现·绿色圆形悬浮</a:t>
+              <a:t> 400px 弹性出现·绿色圆形悬浮</a:t>
             </a:r>
           </a:p>
         </p:txBody>
@@ -21687,7 +21813,7 @@
                 <a:ea typeface="Microsoft YaHei"/>
                 <a:cs typeface="Segoe UI"/>
               </a:rPr>
-              <a:t xml:space="preserve"> backdrop-filter blur(12px)+滚动阴影</a:t>
+              <a:t> backdrop-filter blur(12px)+滚动阴影</a:t>
             </a:r>
           </a:p>
         </p:txBody>
@@ -21738,7 +21864,7 @@
                 <a:ea typeface="Microsoft YaHei"/>
                 <a:cs typeface="Segoe UI"/>
               </a:rPr>
-              <a:t xml:space="preserve"> hover 上浮 1px+阴影·active 下压回弹</a:t>
+              <a:t> hover 上浮 1px+阴影·active 下压回弹</a:t>
             </a:r>
           </a:p>
         </p:txBody>
@@ -21789,7 +21915,7 @@
                 <a:ea typeface="Segoe UI"/>
                 <a:cs typeface="Segoe UI"/>
               </a:rPr>
-              <a:t xml:space="preserve"> shimmer·shake·pulse·fadeInUp·floatAuth</a:t>
+              <a:t> shimmer·shake·pulse·fadeInUp·floatAuth</a:t>
             </a:r>
           </a:p>
         </p:txBody>
@@ -21861,9 +21987,18 @@
   <p:clrMapOvr>
     <a:masterClrMapping/>
   </p:clrMapOvr>
-  <p:transition xmlns:p14="http://schemas.microsoft.com/office/powerpoint/2010/main" p14:dur="400">
-    <p:fade/>
-  </p:transition>
+  <mc:AlternateContent xmlns:mc="http://schemas.openxmlformats.org/markup-compatibility/2006">
+    <mc:Choice xmlns:p14="http://schemas.microsoft.com/office/powerpoint/2010/main" Requires="p14">
+      <p:transition p14:dur="400">
+        <p:fade/>
+      </p:transition>
+    </mc:Choice>
+    <mc:Fallback>
+      <p:transition>
+        <p:fade/>
+      </p:transition>
+    </mc:Fallback>
+  </mc:AlternateContent>
 </p:sld>
 </file>
 
@@ -22214,7 +22349,7 @@
                 <a:ea typeface="Microsoft YaHei"/>
                 <a:cs typeface="Segoe UI"/>
               </a:rPr>
-              <a:t xml:space="preserve"> Hero·公告轮播·分类Tab·商品网格·时间格式化</a:t>
+              <a:t> Hero·公告轮播·分类Tab·商品网格·时间格式化</a:t>
             </a:r>
           </a:p>
         </p:txBody>
@@ -22265,7 +22400,7 @@
                 <a:ea typeface="Microsoft YaHei"/>
                 <a:cs typeface="Segoe UI"/>
               </a:rPr>
-              <a:t xml:space="preserve"> 列表筛选·详情画廊·发布多图·占位图回退</a:t>
+              <a:t> 列表筛选·详情画廊·发布多图·占位图回退</a:t>
             </a:r>
           </a:p>
         </p:txBody>
@@ -22316,7 +22451,7 @@
                 <a:ea typeface="Microsoft YaHei"/>
                 <a:cs typeface="Segoe UI"/>
               </a:rPr>
-              <a:t xml:space="preserve"> 复选框·数量调节·全选·结算栏·防抖同步</a:t>
+              <a:t> 复选框·数量调节·全选·结算栏·防抖同步</a:t>
             </a:r>
           </a:p>
         </p:txBody>
@@ -22367,7 +22502,7 @@
                 <a:ea typeface="Microsoft YaHei"/>
                 <a:cs typeface="Segoe UI"/>
               </a:rPr>
-              <a:t xml:space="preserve"> 6状态Tab·买家卖家视角·订单卡片·statusType复用</a:t>
+              <a:t> 6状态Tab·买家卖家视角·订单卡片·statusType复用</a:t>
             </a:r>
           </a:p>
         </p:txBody>
@@ -22418,7 +22553,7 @@
                 <a:ea typeface="Microsoft YaHei"/>
                 <a:cs typeface="Segoe UI"/>
               </a:rPr>
-              <a:t xml:space="preserve"> 217商品·20分类·15用户·三版图片方案</a:t>
+              <a:t> 217商品·20分类·15用户·三版图片方案</a:t>
             </a:r>
           </a:p>
         </p:txBody>
@@ -22581,7 +22716,7 @@
                 <a:ea typeface="Microsoft YaHei"/>
                 <a:cs typeface="Segoe UI"/>
               </a:rPr>
-              <a:t xml:space="preserve"> 侧边栏导航·路由鉴权·响应式折叠</a:t>
+              <a:t> 侧边栏导航·路由鉴权·响应式折叠</a:t>
             </a:r>
           </a:p>
         </p:txBody>
@@ -22632,7 +22767,7 @@
                 <a:ea typeface="Microsoft YaHei"/>
                 <a:cs typeface="Segoe UI"/>
               </a:rPr>
-              <a:t xml:space="preserve"> 用户·商品审核·订单·统计·公告</a:t>
+              <a:t> 用户·商品审核·订单·统计·公告</a:t>
             </a:r>
           </a:p>
         </p:txBody>
@@ -22683,7 +22818,7 @@
                 <a:ea typeface="Microsoft YaHei"/>
                 <a:cs typeface="Segoe UI"/>
               </a:rPr>
-              <a:t xml:space="preserve"> 分类占比饼图·每日趋势折线图</a:t>
+              <a:t> 分类占比饼图·每日趋势折线图</a:t>
             </a:r>
           </a:p>
         </p:txBody>
@@ -22734,7 +22869,7 @@
                 <a:ea typeface="Microsoft YaHei"/>
                 <a:cs typeface="Segoe UI"/>
               </a:rPr>
-              <a:t xml:space="preserve"> window resize 同步缩放·dispose 防泄漏</a:t>
+              <a:t> window resize 同步缩放·dispose 防泄漏</a:t>
             </a:r>
           </a:p>
         </p:txBody>
@@ -22785,7 +22920,7 @@
                 <a:ea typeface="Microsoft YaHei"/>
                 <a:cs typeface="Segoe UI"/>
               </a:rPr>
-              <a:t xml:space="preserve"> 搜索·筛选·分页·状态流转全覆盖</a:t>
+              <a:t> 搜索·筛选·分页·状态流转全覆盖</a:t>
             </a:r>
           </a:p>
         </p:txBody>
@@ -22857,9 +22992,18 @@
   <p:clrMapOvr>
     <a:masterClrMapping/>
   </p:clrMapOvr>
-  <p:transition xmlns:p14="http://schemas.microsoft.com/office/powerpoint/2010/main" p14:dur="400">
-    <p:fade/>
-  </p:transition>
+  <mc:AlternateContent xmlns:mc="http://schemas.openxmlformats.org/markup-compatibility/2006">
+    <mc:Choice xmlns:p14="http://schemas.microsoft.com/office/powerpoint/2010/main" Requires="p14">
+      <p:transition p14:dur="400">
+        <p:fade/>
+      </p:transition>
+    </mc:Choice>
+    <mc:Fallback>
+      <p:transition>
+        <p:fade/>
+      </p:transition>
+    </mc:Fallback>
+  </mc:AlternateContent>
 </p:sld>
 </file>
 
@@ -23210,7 +23354,7 @@
                 <a:ea typeface="Microsoft YaHei"/>
                 <a:cs typeface="Segoe UI"/>
               </a:rPr>
-              <a:t xml:space="preserve"> SpringSecurity+JWT·双Token·RBAC三级权限</a:t>
+              <a:t> SpringSecurity+JWT·双Token·RBAC三级权限</a:t>
             </a:r>
           </a:p>
         </p:txBody>
@@ -23261,7 +23405,7 @@
                 <a:ea typeface="Microsoft YaHei"/>
                 <a:cs typeface="Segoe UI"/>
               </a:rPr>
-              <a:t xml:space="preserve"> 登录10次/15min·验证码3次/5min（Redis）</a:t>
+              <a:t> 登录10次/15min·验证码3次/5min（Redis）</a:t>
             </a:r>
           </a:p>
         </p:txBody>
@@ -23312,7 +23456,7 @@
                 <a:ea typeface="Microsoft YaHei"/>
                 <a:cs typeface="Segoe UI"/>
               </a:rPr>
-              <a:t xml:space="preserve"> 分页+筛选+全文搜索+N+1批量优化</a:t>
+              <a:t> 分页+筛选+全文搜索+N+1批量优化</a:t>
             </a:r>
           </a:p>
         </p:txBody>
@@ -23363,7 +23507,7 @@
                 <a:ea typeface="Microsoft YaHei"/>
                 <a:cs typeface="Segoe UI"/>
               </a:rPr>
-              <a:t xml:space="preserve"> 悲观锁·自买自卖校验·浏览量控制</a:t>
+              <a:t> 悲观锁·自买自卖校验·浏览量控制</a:t>
             </a:r>
           </a:p>
         </p:txBody>
@@ -23414,7 +23558,7 @@
                 <a:ea typeface="Microsoft YaHei"/>
                 <a:cs typeface="Segoe UI"/>
               </a:rPr>
-              <a:t xml:space="preserve"> 13张表DDL·ENUM约束·全文索引·软删除</a:t>
+              <a:t> 13张表DDL·ENUM约束·全文索引·软删除</a:t>
             </a:r>
           </a:p>
         </p:txBody>
@@ -23577,7 +23721,7 @@
                 <a:ea typeface="Microsoft YaHei"/>
                 <a:cs typeface="Segoe UI"/>
               </a:rPr>
-              <a:t xml:space="preserve"> 待付款→待发货→待收货→已完成/已取消</a:t>
+              <a:t> 待付款→待发货→待收货→已完成/已取消</a:t>
             </a:r>
           </a:p>
         </p:txBody>
@@ -23628,7 +23772,7 @@
                 <a:ea typeface="Microsoft YaHei"/>
                 <a:cs typeface="Segoe UI"/>
               </a:rPr>
-              <a:t xml:space="preserve"> order_log 每次状态变更全追溯</a:t>
+              <a:t> order_log 每次状态变更全追溯</a:t>
             </a:r>
           </a:p>
         </p:txBody>
@@ -23679,7 +23823,7 @@
                 <a:ea typeface="Microsoft YaHei"/>
                 <a:cs typeface="Segoe UI"/>
               </a:rPr>
-              <a:t xml:space="preserve"> 用户管理·商品审核·订单管理·数据统计</a:t>
+              <a:t> 用户管理·商品审核·订单管理·数据统计</a:t>
             </a:r>
           </a:p>
         </p:txBody>
@@ -23730,7 +23874,7 @@
                 <a:ea typeface="Microsoft YaHei"/>
                 <a:cs typeface="Segoe UI"/>
               </a:rPr>
-              <a:t xml:space="preserve"> pom·逻辑删除·自动填充·分页插件</a:t>
+              <a:t> pom·逻辑删除·自动填充·分页插件</a:t>
             </a:r>
           </a:p>
         </p:txBody>
@@ -23781,7 +23925,7 @@
                 <a:ea typeface="Microsoft YaHei"/>
                 <a:cs typeface="Segoe UI"/>
               </a:rPr>
-              <a:t xml:space="preserve"> Knife4j·14单元测试·Result封装</a:t>
+              <a:t> Knife4j·14单元测试·Result封装</a:t>
             </a:r>
           </a:p>
         </p:txBody>
@@ -23853,9 +23997,18 @@
   <p:clrMapOvr>
     <a:masterClrMapping/>
   </p:clrMapOvr>
-  <p:transition xmlns:p14="http://schemas.microsoft.com/office/powerpoint/2010/main" p14:dur="400">
-    <p:fade/>
-  </p:transition>
+  <mc:AlternateContent xmlns:mc="http://schemas.openxmlformats.org/markup-compatibility/2006">
+    <mc:Choice xmlns:p14="http://schemas.microsoft.com/office/powerpoint/2010/main" Requires="p14">
+      <p:transition p14:dur="400">
+        <p:fade/>
+      </p:transition>
+    </mc:Choice>
+    <mc:Fallback>
+      <p:transition>
+        <p:fade/>
+      </p:transition>
+    </mc:Fallback>
+  </mc:AlternateContent>
 </p:sld>
 </file>
 
